--- a/pictures.pptx
+++ b/pictures.pptx
@@ -117,7 +117,7 @@
 <file path=ppt/revisionInfo.xml><?xml version="1.0" encoding="utf-8"?>
 <p1510:revInfo xmlns:a="http://schemas.openxmlformats.org/drawingml/2006/main" xmlns:r="http://schemas.openxmlformats.org/officeDocument/2006/relationships" xmlns:p1510="http://schemas.microsoft.com/office/powerpoint/2015/10/main">
   <p1510:revLst>
-    <p1510:client id="{8352072F-4929-4E63-9D34-A2A1D6459320}" v="3" dt="2025-11-08T02:42:17.392"/>
+    <p1510:client id="{8352072F-4929-4E63-9D34-A2A1D6459320}" v="9" dt="2025-11-17T18:47:25.764"/>
   </p1510:revLst>
 </p1510:revInfo>
 </file>
@@ -126,33 +126,33 @@
 <pc:chgInfo xmlns:a="http://schemas.openxmlformats.org/drawingml/2006/main" xmlns:r="http://schemas.openxmlformats.org/officeDocument/2006/relationships" xmlns:ac="http://schemas.microsoft.com/office/drawing/2013/main/command" xmlns:pc="http://schemas.microsoft.com/office/powerpoint/2013/main/command">
   <pc:docChgLst>
     <pc:chgData name="Francis Banville" userId="8be915f0-3f0a-4a05-97c3-f4d9790eab96" providerId="ADAL" clId="{BC601F08-1BDA-4126-AE0C-DFD186A5B83B}"/>
-    <pc:docChg chg="custSel addSld modSld">
-      <pc:chgData name="Francis Banville" userId="8be915f0-3f0a-4a05-97c3-f4d9790eab96" providerId="ADAL" clId="{BC601F08-1BDA-4126-AE0C-DFD186A5B83B}" dt="2025-11-08T02:42:28.683" v="14" actId="1076"/>
+    <pc:docChg chg="undo custSel addSld modSld">
+      <pc:chgData name="Francis Banville" userId="8be915f0-3f0a-4a05-97c3-f4d9790eab96" providerId="ADAL" clId="{BC601F08-1BDA-4126-AE0C-DFD186A5B83B}" dt="2025-11-17T18:47:56.953" v="32" actId="1076"/>
       <pc:docMkLst>
         <pc:docMk/>
       </pc:docMkLst>
       <pc:sldChg chg="addSp delSp modSp new mod setBg">
-        <pc:chgData name="Francis Banville" userId="8be915f0-3f0a-4a05-97c3-f4d9790eab96" providerId="ADAL" clId="{BC601F08-1BDA-4126-AE0C-DFD186A5B83B}" dt="2025-11-08T02:42:28.683" v="14" actId="1076"/>
+        <pc:chgData name="Francis Banville" userId="8be915f0-3f0a-4a05-97c3-f4d9790eab96" providerId="ADAL" clId="{BC601F08-1BDA-4126-AE0C-DFD186A5B83B}" dt="2025-11-17T18:47:56.953" v="32" actId="1076"/>
         <pc:sldMkLst>
           <pc:docMk/>
           <pc:sldMk cId="2550920875" sldId="258"/>
         </pc:sldMkLst>
-        <pc:spChg chg="del">
-          <ac:chgData name="Francis Banville" userId="8be915f0-3f0a-4a05-97c3-f4d9790eab96" providerId="ADAL" clId="{BC601F08-1BDA-4126-AE0C-DFD186A5B83B}" dt="2025-11-08T02:41:09.849" v="1" actId="478"/>
+        <pc:spChg chg="add">
+          <ac:chgData name="Francis Banville" userId="8be915f0-3f0a-4a05-97c3-f4d9790eab96" providerId="ADAL" clId="{BC601F08-1BDA-4126-AE0C-DFD186A5B83B}" dt="2025-11-17T18:46:56.924" v="16"/>
           <ac:spMkLst>
             <pc:docMk/>
             <pc:sldMk cId="2550920875" sldId="258"/>
-            <ac:spMk id="2" creationId="{43D354C1-A169-F29F-72F8-CFC7AE93B00A}"/>
+            <ac:spMk id="2" creationId="{B11DF44C-307B-53D0-66B1-DCA605C1E3E1}"/>
           </ac:spMkLst>
         </pc:spChg>
-        <pc:spChg chg="del">
-          <ac:chgData name="Francis Banville" userId="8be915f0-3f0a-4a05-97c3-f4d9790eab96" providerId="ADAL" clId="{BC601F08-1BDA-4126-AE0C-DFD186A5B83B}" dt="2025-11-08T02:41:11.529" v="2" actId="478"/>
-          <ac:spMkLst>
+        <pc:picChg chg="add mod">
+          <ac:chgData name="Francis Banville" userId="8be915f0-3f0a-4a05-97c3-f4d9790eab96" providerId="ADAL" clId="{BC601F08-1BDA-4126-AE0C-DFD186A5B83B}" dt="2025-11-17T18:47:56.953" v="32" actId="1076"/>
+          <ac:picMkLst>
             <pc:docMk/>
             <pc:sldMk cId="2550920875" sldId="258"/>
-            <ac:spMk id="3" creationId="{789E047E-6CAE-6E78-B2C7-47F995005379}"/>
-          </ac:spMkLst>
-        </pc:spChg>
+            <ac:picMk id="3" creationId="{955F2CD0-006A-D60C-FBBC-33AE9B4106C8}"/>
+          </ac:picMkLst>
+        </pc:picChg>
         <pc:picChg chg="add mod">
           <ac:chgData name="Francis Banville" userId="8be915f0-3f0a-4a05-97c3-f4d9790eab96" providerId="ADAL" clId="{BC601F08-1BDA-4126-AE0C-DFD186A5B83B}" dt="2025-11-08T02:42:04.003" v="6" actId="962"/>
           <ac:picMkLst>
@@ -161,8 +161,8 @@
             <ac:picMk id="5" creationId="{676BEA68-3ED2-C0CE-3EFF-F13CB28D4093}"/>
           </ac:picMkLst>
         </pc:picChg>
-        <pc:picChg chg="add mod">
-          <ac:chgData name="Francis Banville" userId="8be915f0-3f0a-4a05-97c3-f4d9790eab96" providerId="ADAL" clId="{BC601F08-1BDA-4126-AE0C-DFD186A5B83B}" dt="2025-11-08T02:42:28.683" v="14" actId="1076"/>
+        <pc:picChg chg="add del mod">
+          <ac:chgData name="Francis Banville" userId="8be915f0-3f0a-4a05-97c3-f4d9790eab96" providerId="ADAL" clId="{BC601F08-1BDA-4126-AE0C-DFD186A5B83B}" dt="2025-11-17T18:46:56.354" v="15" actId="478"/>
           <ac:picMkLst>
             <pc:docMk/>
             <pc:sldMk cId="2550920875" sldId="258"/>
@@ -306,7 +306,7 @@
           <a:p>
             <a:fld id="{65BDA79E-ECE0-4F78-BA93-E393AD04CE65}" type="datetimeFigureOut">
               <a:rPr lang="fr-CA" smtClean="0"/>
-              <a:t>2025-11-07</a:t>
+              <a:t>2025-11-17</a:t>
             </a:fld>
             <a:endParaRPr lang="fr-CA"/>
           </a:p>
@@ -476,7 +476,7 @@
           <a:p>
             <a:fld id="{65BDA79E-ECE0-4F78-BA93-E393AD04CE65}" type="datetimeFigureOut">
               <a:rPr lang="fr-CA" smtClean="0"/>
-              <a:t>2025-11-07</a:t>
+              <a:t>2025-11-17</a:t>
             </a:fld>
             <a:endParaRPr lang="fr-CA"/>
           </a:p>
@@ -656,7 +656,7 @@
           <a:p>
             <a:fld id="{65BDA79E-ECE0-4F78-BA93-E393AD04CE65}" type="datetimeFigureOut">
               <a:rPr lang="fr-CA" smtClean="0"/>
-              <a:t>2025-11-07</a:t>
+              <a:t>2025-11-17</a:t>
             </a:fld>
             <a:endParaRPr lang="fr-CA"/>
           </a:p>
@@ -826,7 +826,7 @@
           <a:p>
             <a:fld id="{65BDA79E-ECE0-4F78-BA93-E393AD04CE65}" type="datetimeFigureOut">
               <a:rPr lang="fr-CA" smtClean="0"/>
-              <a:t>2025-11-07</a:t>
+              <a:t>2025-11-17</a:t>
             </a:fld>
             <a:endParaRPr lang="fr-CA"/>
           </a:p>
@@ -1072,7 +1072,7 @@
           <a:p>
             <a:fld id="{65BDA79E-ECE0-4F78-BA93-E393AD04CE65}" type="datetimeFigureOut">
               <a:rPr lang="fr-CA" smtClean="0"/>
-              <a:t>2025-11-07</a:t>
+              <a:t>2025-11-17</a:t>
             </a:fld>
             <a:endParaRPr lang="fr-CA"/>
           </a:p>
@@ -1304,7 +1304,7 @@
           <a:p>
             <a:fld id="{65BDA79E-ECE0-4F78-BA93-E393AD04CE65}" type="datetimeFigureOut">
               <a:rPr lang="fr-CA" smtClean="0"/>
-              <a:t>2025-11-07</a:t>
+              <a:t>2025-11-17</a:t>
             </a:fld>
             <a:endParaRPr lang="fr-CA"/>
           </a:p>
@@ -1671,7 +1671,7 @@
           <a:p>
             <a:fld id="{65BDA79E-ECE0-4F78-BA93-E393AD04CE65}" type="datetimeFigureOut">
               <a:rPr lang="fr-CA" smtClean="0"/>
-              <a:t>2025-11-07</a:t>
+              <a:t>2025-11-17</a:t>
             </a:fld>
             <a:endParaRPr lang="fr-CA"/>
           </a:p>
@@ -1789,7 +1789,7 @@
           <a:p>
             <a:fld id="{65BDA79E-ECE0-4F78-BA93-E393AD04CE65}" type="datetimeFigureOut">
               <a:rPr lang="fr-CA" smtClean="0"/>
-              <a:t>2025-11-07</a:t>
+              <a:t>2025-11-17</a:t>
             </a:fld>
             <a:endParaRPr lang="fr-CA"/>
           </a:p>
@@ -1884,7 +1884,7 @@
           <a:p>
             <a:fld id="{65BDA79E-ECE0-4F78-BA93-E393AD04CE65}" type="datetimeFigureOut">
               <a:rPr lang="fr-CA" smtClean="0"/>
-              <a:t>2025-11-07</a:t>
+              <a:t>2025-11-17</a:t>
             </a:fld>
             <a:endParaRPr lang="fr-CA"/>
           </a:p>
@@ -2161,7 +2161,7 @@
           <a:p>
             <a:fld id="{65BDA79E-ECE0-4F78-BA93-E393AD04CE65}" type="datetimeFigureOut">
               <a:rPr lang="fr-CA" smtClean="0"/>
-              <a:t>2025-11-07</a:t>
+              <a:t>2025-11-17</a:t>
             </a:fld>
             <a:endParaRPr lang="fr-CA"/>
           </a:p>
@@ -2418,7 +2418,7 @@
           <a:p>
             <a:fld id="{65BDA79E-ECE0-4F78-BA93-E393AD04CE65}" type="datetimeFigureOut">
               <a:rPr lang="fr-CA" smtClean="0"/>
-              <a:t>2025-11-07</a:t>
+              <a:t>2025-11-17</a:t>
             </a:fld>
             <a:endParaRPr lang="fr-CA"/>
           </a:p>
@@ -2631,7 +2631,7 @@
           <a:p>
             <a:fld id="{65BDA79E-ECE0-4F78-BA93-E393AD04CE65}" type="datetimeFigureOut">
               <a:rPr lang="fr-CA" smtClean="0"/>
-              <a:t>2025-11-07</a:t>
+              <a:t>2025-11-17</a:t>
             </a:fld>
             <a:endParaRPr lang="fr-CA"/>
           </a:p>
@@ -3396,10 +3396,10 @@
       </p:pic>
       <p:pic>
         <p:nvPicPr>
-          <p:cNvPr id="7" name="Image 6" descr="Une image contenant diagramme, texte, capture d’écran, Tracé&#10;&#10;Le contenu généré par l’IA peut être incorrect.">
+          <p:cNvPr id="3" name="Image 2">
             <a:extLst>
               <a:ext uri="{FF2B5EF4-FFF2-40B4-BE49-F238E27FC236}">
-                <a16:creationId xmlns:a16="http://schemas.microsoft.com/office/drawing/2014/main" id="{FE377E59-7242-63CC-02BF-6C5F7ABD8146}"/>
+                <a16:creationId xmlns:a16="http://schemas.microsoft.com/office/drawing/2014/main" id="{955F2CD0-006A-D60C-FBBC-33AE9B4106C8}"/>
               </a:ext>
             </a:extLst>
           </p:cNvPr>
@@ -3409,24 +3409,20 @@
           <p:nvPr/>
         </p:nvPicPr>
         <p:blipFill>
-          <a:blip r:embed="rId3">
-            <a:extLst>
-              <a:ext uri="{28A0092B-C50C-407E-A947-70E740481C1C}">
-                <a14:useLocalDpi xmlns:a14="http://schemas.microsoft.com/office/drawing/2010/main" val="0"/>
-              </a:ext>
-            </a:extLst>
-          </a:blip>
+          <a:blip r:embed="rId3"/>
           <a:stretch>
             <a:fillRect/>
           </a:stretch>
         </p:blipFill>
         <p:spPr>
           <a:xfrm>
-            <a:off x="3014152" y="1329114"/>
-            <a:ext cx="6163694" cy="4199772"/>
+            <a:off x="2286206" y="1409809"/>
+            <a:ext cx="7619588" cy="4038382"/>
           </a:xfrm>
-          <a:prstGeom prst="rect">
-            <a:avLst/>
+          <a:prstGeom prst="roundRect">
+            <a:avLst>
+              <a:gd name="adj" fmla="val 7618"/>
+            </a:avLst>
           </a:prstGeom>
         </p:spPr>
       </p:pic>

--- a/pictures.pptx
+++ b/pictures.pptx
@@ -306,7 +306,7 @@
           <a:p>
             <a:fld id="{65BDA79E-ECE0-4F78-BA93-E393AD04CE65}" type="datetimeFigureOut">
               <a:rPr lang="fr-CA" smtClean="0"/>
-              <a:t>2025-11-17</a:t>
+              <a:t>2025-12-16</a:t>
             </a:fld>
             <a:endParaRPr lang="fr-CA"/>
           </a:p>
@@ -476,7 +476,7 @@
           <a:p>
             <a:fld id="{65BDA79E-ECE0-4F78-BA93-E393AD04CE65}" type="datetimeFigureOut">
               <a:rPr lang="fr-CA" smtClean="0"/>
-              <a:t>2025-11-17</a:t>
+              <a:t>2025-12-16</a:t>
             </a:fld>
             <a:endParaRPr lang="fr-CA"/>
           </a:p>
@@ -656,7 +656,7 @@
           <a:p>
             <a:fld id="{65BDA79E-ECE0-4F78-BA93-E393AD04CE65}" type="datetimeFigureOut">
               <a:rPr lang="fr-CA" smtClean="0"/>
-              <a:t>2025-11-17</a:t>
+              <a:t>2025-12-16</a:t>
             </a:fld>
             <a:endParaRPr lang="fr-CA"/>
           </a:p>
@@ -826,7 +826,7 @@
           <a:p>
             <a:fld id="{65BDA79E-ECE0-4F78-BA93-E393AD04CE65}" type="datetimeFigureOut">
               <a:rPr lang="fr-CA" smtClean="0"/>
-              <a:t>2025-11-17</a:t>
+              <a:t>2025-12-16</a:t>
             </a:fld>
             <a:endParaRPr lang="fr-CA"/>
           </a:p>
@@ -1072,7 +1072,7 @@
           <a:p>
             <a:fld id="{65BDA79E-ECE0-4F78-BA93-E393AD04CE65}" type="datetimeFigureOut">
               <a:rPr lang="fr-CA" smtClean="0"/>
-              <a:t>2025-11-17</a:t>
+              <a:t>2025-12-16</a:t>
             </a:fld>
             <a:endParaRPr lang="fr-CA"/>
           </a:p>
@@ -1304,7 +1304,7 @@
           <a:p>
             <a:fld id="{65BDA79E-ECE0-4F78-BA93-E393AD04CE65}" type="datetimeFigureOut">
               <a:rPr lang="fr-CA" smtClean="0"/>
-              <a:t>2025-11-17</a:t>
+              <a:t>2025-12-16</a:t>
             </a:fld>
             <a:endParaRPr lang="fr-CA"/>
           </a:p>
@@ -1671,7 +1671,7 @@
           <a:p>
             <a:fld id="{65BDA79E-ECE0-4F78-BA93-E393AD04CE65}" type="datetimeFigureOut">
               <a:rPr lang="fr-CA" smtClean="0"/>
-              <a:t>2025-11-17</a:t>
+              <a:t>2025-12-16</a:t>
             </a:fld>
             <a:endParaRPr lang="fr-CA"/>
           </a:p>
@@ -1789,7 +1789,7 @@
           <a:p>
             <a:fld id="{65BDA79E-ECE0-4F78-BA93-E393AD04CE65}" type="datetimeFigureOut">
               <a:rPr lang="fr-CA" smtClean="0"/>
-              <a:t>2025-11-17</a:t>
+              <a:t>2025-12-16</a:t>
             </a:fld>
             <a:endParaRPr lang="fr-CA"/>
           </a:p>
@@ -1884,7 +1884,7 @@
           <a:p>
             <a:fld id="{65BDA79E-ECE0-4F78-BA93-E393AD04CE65}" type="datetimeFigureOut">
               <a:rPr lang="fr-CA" smtClean="0"/>
-              <a:t>2025-11-17</a:t>
+              <a:t>2025-12-16</a:t>
             </a:fld>
             <a:endParaRPr lang="fr-CA"/>
           </a:p>
@@ -2161,7 +2161,7 @@
           <a:p>
             <a:fld id="{65BDA79E-ECE0-4F78-BA93-E393AD04CE65}" type="datetimeFigureOut">
               <a:rPr lang="fr-CA" smtClean="0"/>
-              <a:t>2025-11-17</a:t>
+              <a:t>2025-12-16</a:t>
             </a:fld>
             <a:endParaRPr lang="fr-CA"/>
           </a:p>
@@ -2418,7 +2418,7 @@
           <a:p>
             <a:fld id="{65BDA79E-ECE0-4F78-BA93-E393AD04CE65}" type="datetimeFigureOut">
               <a:rPr lang="fr-CA" smtClean="0"/>
-              <a:t>2025-11-17</a:t>
+              <a:t>2025-12-16</a:t>
             </a:fld>
             <a:endParaRPr lang="fr-CA"/>
           </a:p>
@@ -2631,7 +2631,7 @@
           <a:p>
             <a:fld id="{65BDA79E-ECE0-4F78-BA93-E393AD04CE65}" type="datetimeFigureOut">
               <a:rPr lang="fr-CA" smtClean="0"/>
-              <a:t>2025-11-17</a:t>
+              <a:t>2025-12-16</a:t>
             </a:fld>
             <a:endParaRPr lang="fr-CA"/>
           </a:p>
@@ -3394,38 +3394,6 @@
           </a:prstGeom>
         </p:spPr>
       </p:pic>
-      <p:pic>
-        <p:nvPicPr>
-          <p:cNvPr id="3" name="Image 2">
-            <a:extLst>
-              <a:ext uri="{FF2B5EF4-FFF2-40B4-BE49-F238E27FC236}">
-                <a16:creationId xmlns:a16="http://schemas.microsoft.com/office/drawing/2014/main" id="{955F2CD0-006A-D60C-FBBC-33AE9B4106C8}"/>
-              </a:ext>
-            </a:extLst>
-          </p:cNvPr>
-          <p:cNvPicPr>
-            <a:picLocks noChangeAspect="1"/>
-          </p:cNvPicPr>
-          <p:nvPr/>
-        </p:nvPicPr>
-        <p:blipFill>
-          <a:blip r:embed="rId3"/>
-          <a:stretch>
-            <a:fillRect/>
-          </a:stretch>
-        </p:blipFill>
-        <p:spPr>
-          <a:xfrm>
-            <a:off x="2286206" y="1409809"/>
-            <a:ext cx="7619588" cy="4038382"/>
-          </a:xfrm>
-          <a:prstGeom prst="roundRect">
-            <a:avLst>
-              <a:gd name="adj" fmla="val 7618"/>
-            </a:avLst>
-          </a:prstGeom>
-        </p:spPr>
-      </p:pic>
     </p:spTree>
     <p:extLst>
       <p:ext uri="{BB962C8B-B14F-4D97-AF65-F5344CB8AC3E}">

--- a/pictures.pptx
+++ b/pictures.pptx
@@ -114,59 +114,35 @@
 </p:presentation>
 </file>
 
-<file path=ppt/revisionInfo.xml><?xml version="1.0" encoding="utf-8"?>
-<p1510:revInfo xmlns:a="http://schemas.openxmlformats.org/drawingml/2006/main" xmlns:r="http://schemas.openxmlformats.org/officeDocument/2006/relationships" xmlns:p1510="http://schemas.microsoft.com/office/powerpoint/2015/10/main">
-  <p1510:revLst>
-    <p1510:client id="{8352072F-4929-4E63-9D34-A2A1D6459320}" v="9" dt="2025-11-17T18:47:25.764"/>
-  </p1510:revLst>
-</p1510:revInfo>
-</file>
-
 <file path=ppt/changesInfos/changesInfo1.xml><?xml version="1.0" encoding="utf-8"?>
 <pc:chgInfo xmlns:a="http://schemas.openxmlformats.org/drawingml/2006/main" xmlns:r="http://schemas.openxmlformats.org/officeDocument/2006/relationships" xmlns:ac="http://schemas.microsoft.com/office/drawing/2013/main/command" xmlns:pc="http://schemas.microsoft.com/office/powerpoint/2013/main/command">
   <pc:docChgLst>
     <pc:chgData name="Francis Banville" userId="8be915f0-3f0a-4a05-97c3-f4d9790eab96" providerId="ADAL" clId="{BC601F08-1BDA-4126-AE0C-DFD186A5B83B}"/>
     <pc:docChg chg="undo custSel addSld modSld">
-      <pc:chgData name="Francis Banville" userId="8be915f0-3f0a-4a05-97c3-f4d9790eab96" providerId="ADAL" clId="{BC601F08-1BDA-4126-AE0C-DFD186A5B83B}" dt="2025-11-17T18:47:56.953" v="32" actId="1076"/>
+      <pc:chgData name="Francis Banville" userId="8be915f0-3f0a-4a05-97c3-f4d9790eab96" providerId="ADAL" clId="{BC601F08-1BDA-4126-AE0C-DFD186A5B83B}" dt="2026-05-14T12:52:34.175" v="48" actId="1076"/>
       <pc:docMkLst>
         <pc:docMk/>
       </pc:docMkLst>
       <pc:sldChg chg="addSp delSp modSp new mod setBg">
-        <pc:chgData name="Francis Banville" userId="8be915f0-3f0a-4a05-97c3-f4d9790eab96" providerId="ADAL" clId="{BC601F08-1BDA-4126-AE0C-DFD186A5B83B}" dt="2025-11-17T18:47:56.953" v="32" actId="1076"/>
+        <pc:chgData name="Francis Banville" userId="8be915f0-3f0a-4a05-97c3-f4d9790eab96" providerId="ADAL" clId="{BC601F08-1BDA-4126-AE0C-DFD186A5B83B}" dt="2026-05-14T12:52:34.175" v="48" actId="1076"/>
         <pc:sldMkLst>
           <pc:docMk/>
           <pc:sldMk cId="2550920875" sldId="258"/>
         </pc:sldMkLst>
-        <pc:spChg chg="add">
-          <ac:chgData name="Francis Banville" userId="8be915f0-3f0a-4a05-97c3-f4d9790eab96" providerId="ADAL" clId="{BC601F08-1BDA-4126-AE0C-DFD186A5B83B}" dt="2025-11-17T18:46:56.924" v="16"/>
-          <ac:spMkLst>
-            <pc:docMk/>
-            <pc:sldMk cId="2550920875" sldId="258"/>
-            <ac:spMk id="2" creationId="{B11DF44C-307B-53D0-66B1-DCA605C1E3E1}"/>
-          </ac:spMkLst>
-        </pc:spChg>
         <pc:picChg chg="add mod">
-          <ac:chgData name="Francis Banville" userId="8be915f0-3f0a-4a05-97c3-f4d9790eab96" providerId="ADAL" clId="{BC601F08-1BDA-4126-AE0C-DFD186A5B83B}" dt="2025-11-17T18:47:56.953" v="32" actId="1076"/>
+          <ac:chgData name="Francis Banville" userId="8be915f0-3f0a-4a05-97c3-f4d9790eab96" providerId="ADAL" clId="{BC601F08-1BDA-4126-AE0C-DFD186A5B83B}" dt="2026-05-14T12:52:34.175" v="48" actId="1076"/>
           <ac:picMkLst>
             <pc:docMk/>
             <pc:sldMk cId="2550920875" sldId="258"/>
-            <ac:picMk id="3" creationId="{955F2CD0-006A-D60C-FBBC-33AE9B4106C8}"/>
+            <ac:picMk id="3" creationId="{97B2515D-DB36-A10C-6B21-E209C409902C}"/>
           </ac:picMkLst>
         </pc:picChg>
         <pc:picChg chg="add mod">
-          <ac:chgData name="Francis Banville" userId="8be915f0-3f0a-4a05-97c3-f4d9790eab96" providerId="ADAL" clId="{BC601F08-1BDA-4126-AE0C-DFD186A5B83B}" dt="2025-11-08T02:42:04.003" v="6" actId="962"/>
+          <ac:chgData name="Francis Banville" userId="8be915f0-3f0a-4a05-97c3-f4d9790eab96" providerId="ADAL" clId="{BC601F08-1BDA-4126-AE0C-DFD186A5B83B}" dt="2026-05-14T12:52:32.221" v="47" actId="1076"/>
           <ac:picMkLst>
             <pc:docMk/>
             <pc:sldMk cId="2550920875" sldId="258"/>
             <ac:picMk id="5" creationId="{676BEA68-3ED2-C0CE-3EFF-F13CB28D4093}"/>
-          </ac:picMkLst>
-        </pc:picChg>
-        <pc:picChg chg="add del mod">
-          <ac:chgData name="Francis Banville" userId="8be915f0-3f0a-4a05-97c3-f4d9790eab96" providerId="ADAL" clId="{BC601F08-1BDA-4126-AE0C-DFD186A5B83B}" dt="2025-11-17T18:46:56.354" v="15" actId="478"/>
-          <ac:picMkLst>
-            <pc:docMk/>
-            <pc:sldMk cId="2550920875" sldId="258"/>
-            <ac:picMk id="7" creationId="{FE377E59-7242-63CC-02BF-6C5F7ABD8146}"/>
           </ac:picMkLst>
         </pc:picChg>
       </pc:sldChg>
@@ -306,7 +282,7 @@
           <a:p>
             <a:fld id="{65BDA79E-ECE0-4F78-BA93-E393AD04CE65}" type="datetimeFigureOut">
               <a:rPr lang="fr-CA" smtClean="0"/>
-              <a:t>2025-12-16</a:t>
+              <a:t>2026-05-14</a:t>
             </a:fld>
             <a:endParaRPr lang="fr-CA"/>
           </a:p>
@@ -476,7 +452,7 @@
           <a:p>
             <a:fld id="{65BDA79E-ECE0-4F78-BA93-E393AD04CE65}" type="datetimeFigureOut">
               <a:rPr lang="fr-CA" smtClean="0"/>
-              <a:t>2025-12-16</a:t>
+              <a:t>2026-05-14</a:t>
             </a:fld>
             <a:endParaRPr lang="fr-CA"/>
           </a:p>
@@ -656,7 +632,7 @@
           <a:p>
             <a:fld id="{65BDA79E-ECE0-4F78-BA93-E393AD04CE65}" type="datetimeFigureOut">
               <a:rPr lang="fr-CA" smtClean="0"/>
-              <a:t>2025-12-16</a:t>
+              <a:t>2026-05-14</a:t>
             </a:fld>
             <a:endParaRPr lang="fr-CA"/>
           </a:p>
@@ -826,7 +802,7 @@
           <a:p>
             <a:fld id="{65BDA79E-ECE0-4F78-BA93-E393AD04CE65}" type="datetimeFigureOut">
               <a:rPr lang="fr-CA" smtClean="0"/>
-              <a:t>2025-12-16</a:t>
+              <a:t>2026-05-14</a:t>
             </a:fld>
             <a:endParaRPr lang="fr-CA"/>
           </a:p>
@@ -1072,7 +1048,7 @@
           <a:p>
             <a:fld id="{65BDA79E-ECE0-4F78-BA93-E393AD04CE65}" type="datetimeFigureOut">
               <a:rPr lang="fr-CA" smtClean="0"/>
-              <a:t>2025-12-16</a:t>
+              <a:t>2026-05-14</a:t>
             </a:fld>
             <a:endParaRPr lang="fr-CA"/>
           </a:p>
@@ -1304,7 +1280,7 @@
           <a:p>
             <a:fld id="{65BDA79E-ECE0-4F78-BA93-E393AD04CE65}" type="datetimeFigureOut">
               <a:rPr lang="fr-CA" smtClean="0"/>
-              <a:t>2025-12-16</a:t>
+              <a:t>2026-05-14</a:t>
             </a:fld>
             <a:endParaRPr lang="fr-CA"/>
           </a:p>
@@ -1671,7 +1647,7 @@
           <a:p>
             <a:fld id="{65BDA79E-ECE0-4F78-BA93-E393AD04CE65}" type="datetimeFigureOut">
               <a:rPr lang="fr-CA" smtClean="0"/>
-              <a:t>2025-12-16</a:t>
+              <a:t>2026-05-14</a:t>
             </a:fld>
             <a:endParaRPr lang="fr-CA"/>
           </a:p>
@@ -1789,7 +1765,7 @@
           <a:p>
             <a:fld id="{65BDA79E-ECE0-4F78-BA93-E393AD04CE65}" type="datetimeFigureOut">
               <a:rPr lang="fr-CA" smtClean="0"/>
-              <a:t>2025-12-16</a:t>
+              <a:t>2026-05-14</a:t>
             </a:fld>
             <a:endParaRPr lang="fr-CA"/>
           </a:p>
@@ -1884,7 +1860,7 @@
           <a:p>
             <a:fld id="{65BDA79E-ECE0-4F78-BA93-E393AD04CE65}" type="datetimeFigureOut">
               <a:rPr lang="fr-CA" smtClean="0"/>
-              <a:t>2025-12-16</a:t>
+              <a:t>2026-05-14</a:t>
             </a:fld>
             <a:endParaRPr lang="fr-CA"/>
           </a:p>
@@ -2161,7 +2137,7 @@
           <a:p>
             <a:fld id="{65BDA79E-ECE0-4F78-BA93-E393AD04CE65}" type="datetimeFigureOut">
               <a:rPr lang="fr-CA" smtClean="0"/>
-              <a:t>2025-12-16</a:t>
+              <a:t>2026-05-14</a:t>
             </a:fld>
             <a:endParaRPr lang="fr-CA"/>
           </a:p>
@@ -2418,7 +2394,7 @@
           <a:p>
             <a:fld id="{65BDA79E-ECE0-4F78-BA93-E393AD04CE65}" type="datetimeFigureOut">
               <a:rPr lang="fr-CA" smtClean="0"/>
-              <a:t>2025-12-16</a:t>
+              <a:t>2026-05-14</a:t>
             </a:fld>
             <a:endParaRPr lang="fr-CA"/>
           </a:p>
@@ -2631,7 +2607,7 @@
           <a:p>
             <a:fld id="{65BDA79E-ECE0-4F78-BA93-E393AD04CE65}" type="datetimeFigureOut">
               <a:rPr lang="fr-CA" smtClean="0"/>
-              <a:t>2025-12-16</a:t>
+              <a:t>2026-05-14</a:t>
             </a:fld>
             <a:endParaRPr lang="fr-CA"/>
           </a:p>
@@ -3394,6 +3370,42 @@
           </a:prstGeom>
         </p:spPr>
       </p:pic>
+      <p:pic>
+        <p:nvPicPr>
+          <p:cNvPr id="3" name="Image 2">
+            <a:extLst>
+              <a:ext uri="{FF2B5EF4-FFF2-40B4-BE49-F238E27FC236}">
+                <a16:creationId xmlns:a16="http://schemas.microsoft.com/office/drawing/2014/main" id="{97B2515D-DB36-A10C-6B21-E209C409902C}"/>
+              </a:ext>
+            </a:extLst>
+          </p:cNvPr>
+          <p:cNvPicPr>
+            <a:picLocks noChangeAspect="1"/>
+          </p:cNvPicPr>
+          <p:nvPr/>
+        </p:nvPicPr>
+        <p:blipFill>
+          <a:blip r:embed="rId3">
+            <a:extLst>
+              <a:ext uri="{28A0092B-C50C-407E-A947-70E740481C1C}">
+                <a14:useLocalDpi xmlns:a14="http://schemas.microsoft.com/office/drawing/2010/main" val="0"/>
+              </a:ext>
+            </a:extLst>
+          </a:blip>
+          <a:stretch>
+            <a:fillRect/>
+          </a:stretch>
+        </p:blipFill>
+        <p:spPr>
+          <a:xfrm>
+            <a:off x="3351363" y="1370522"/>
+            <a:ext cx="5489273" cy="4116955"/>
+          </a:xfrm>
+          <a:prstGeom prst="rect">
+            <a:avLst/>
+          </a:prstGeom>
+        </p:spPr>
+      </p:pic>
     </p:spTree>
     <p:extLst>
       <p:ext uri="{BB962C8B-B14F-4D97-AF65-F5344CB8AC3E}">

--- a/pictures.pptx
+++ b/pictures.pptx
@@ -282,7 +282,7 @@
           <a:p>
             <a:fld id="{65BDA79E-ECE0-4F78-BA93-E393AD04CE65}" type="datetimeFigureOut">
               <a:rPr lang="fr-CA" smtClean="0"/>
-              <a:t>2026-05-14</a:t>
+              <a:t>2026-08-03</a:t>
             </a:fld>
             <a:endParaRPr lang="fr-CA"/>
           </a:p>
@@ -452,7 +452,7 @@
           <a:p>
             <a:fld id="{65BDA79E-ECE0-4F78-BA93-E393AD04CE65}" type="datetimeFigureOut">
               <a:rPr lang="fr-CA" smtClean="0"/>
-              <a:t>2026-05-14</a:t>
+              <a:t>2026-08-03</a:t>
             </a:fld>
             <a:endParaRPr lang="fr-CA"/>
           </a:p>
@@ -632,7 +632,7 @@
           <a:p>
             <a:fld id="{65BDA79E-ECE0-4F78-BA93-E393AD04CE65}" type="datetimeFigureOut">
               <a:rPr lang="fr-CA" smtClean="0"/>
-              <a:t>2026-05-14</a:t>
+              <a:t>2026-08-03</a:t>
             </a:fld>
             <a:endParaRPr lang="fr-CA"/>
           </a:p>
@@ -802,7 +802,7 @@
           <a:p>
             <a:fld id="{65BDA79E-ECE0-4F78-BA93-E393AD04CE65}" type="datetimeFigureOut">
               <a:rPr lang="fr-CA" smtClean="0"/>
-              <a:t>2026-05-14</a:t>
+              <a:t>2026-08-03</a:t>
             </a:fld>
             <a:endParaRPr lang="fr-CA"/>
           </a:p>
@@ -1048,7 +1048,7 @@
           <a:p>
             <a:fld id="{65BDA79E-ECE0-4F78-BA93-E393AD04CE65}" type="datetimeFigureOut">
               <a:rPr lang="fr-CA" smtClean="0"/>
-              <a:t>2026-05-14</a:t>
+              <a:t>2026-08-03</a:t>
             </a:fld>
             <a:endParaRPr lang="fr-CA"/>
           </a:p>
@@ -1280,7 +1280,7 @@
           <a:p>
             <a:fld id="{65BDA79E-ECE0-4F78-BA93-E393AD04CE65}" type="datetimeFigureOut">
               <a:rPr lang="fr-CA" smtClean="0"/>
-              <a:t>2026-05-14</a:t>
+              <a:t>2026-08-03</a:t>
             </a:fld>
             <a:endParaRPr lang="fr-CA"/>
           </a:p>
@@ -1647,7 +1647,7 @@
           <a:p>
             <a:fld id="{65BDA79E-ECE0-4F78-BA93-E393AD04CE65}" type="datetimeFigureOut">
               <a:rPr lang="fr-CA" smtClean="0"/>
-              <a:t>2026-05-14</a:t>
+              <a:t>2026-08-03</a:t>
             </a:fld>
             <a:endParaRPr lang="fr-CA"/>
           </a:p>
@@ -1765,7 +1765,7 @@
           <a:p>
             <a:fld id="{65BDA79E-ECE0-4F78-BA93-E393AD04CE65}" type="datetimeFigureOut">
               <a:rPr lang="fr-CA" smtClean="0"/>
-              <a:t>2026-05-14</a:t>
+              <a:t>2026-08-03</a:t>
             </a:fld>
             <a:endParaRPr lang="fr-CA"/>
           </a:p>
@@ -1860,7 +1860,7 @@
           <a:p>
             <a:fld id="{65BDA79E-ECE0-4F78-BA93-E393AD04CE65}" type="datetimeFigureOut">
               <a:rPr lang="fr-CA" smtClean="0"/>
-              <a:t>2026-05-14</a:t>
+              <a:t>2026-08-03</a:t>
             </a:fld>
             <a:endParaRPr lang="fr-CA"/>
           </a:p>
@@ -2137,7 +2137,7 @@
           <a:p>
             <a:fld id="{65BDA79E-ECE0-4F78-BA93-E393AD04CE65}" type="datetimeFigureOut">
               <a:rPr lang="fr-CA" smtClean="0"/>
-              <a:t>2026-05-14</a:t>
+              <a:t>2026-08-03</a:t>
             </a:fld>
             <a:endParaRPr lang="fr-CA"/>
           </a:p>
@@ -2394,7 +2394,7 @@
           <a:p>
             <a:fld id="{65BDA79E-ECE0-4F78-BA93-E393AD04CE65}" type="datetimeFigureOut">
               <a:rPr lang="fr-CA" smtClean="0"/>
-              <a:t>2026-05-14</a:t>
+              <a:t>2026-08-03</a:t>
             </a:fld>
             <a:endParaRPr lang="fr-CA"/>
           </a:p>
@@ -2607,7 +2607,7 @@
           <a:p>
             <a:fld id="{65BDA79E-ECE0-4F78-BA93-E393AD04CE65}" type="datetimeFigureOut">
               <a:rPr lang="fr-CA" smtClean="0"/>
-              <a:t>2026-05-14</a:t>
+              <a:t>2026-08-03</a:t>
             </a:fld>
             <a:endParaRPr lang="fr-CA"/>
           </a:p>
@@ -3372,10 +3372,10 @@
       </p:pic>
       <p:pic>
         <p:nvPicPr>
-          <p:cNvPr id="3" name="Image 2">
+          <p:cNvPr id="4" name="Image 3">
             <a:extLst>
               <a:ext uri="{FF2B5EF4-FFF2-40B4-BE49-F238E27FC236}">
-                <a16:creationId xmlns:a16="http://schemas.microsoft.com/office/drawing/2014/main" id="{97B2515D-DB36-A10C-6B21-E209C409902C}"/>
+                <a16:creationId xmlns:a16="http://schemas.microsoft.com/office/drawing/2014/main" id="{42E473BF-73D2-3CD8-885F-A26DD72AA7C4}"/>
               </a:ext>
             </a:extLst>
           </p:cNvPr>
@@ -3392,14 +3392,15 @@
               </a:ext>
             </a:extLst>
           </a:blip>
+          <a:srcRect t="3366" b="2992"/>
           <a:stretch>
             <a:fillRect/>
           </a:stretch>
         </p:blipFill>
         <p:spPr>
           <a:xfrm>
-            <a:off x="3351363" y="1370522"/>
-            <a:ext cx="5489273" cy="4116955"/>
+            <a:off x="3857820" y="1327883"/>
+            <a:ext cx="4476359" cy="4202234"/>
           </a:xfrm>
           <a:prstGeom prst="rect">
             <a:avLst/>
